--- a/handoff/한화손보_장기CM_태깅가이드.pptx
+++ b/handoff/한화손보_장기CM_태깅가이드.pptx
@@ -16,6 +16,7 @@
     <p:sldId id="264" r:id="rId15"/>
     <p:sldId id="265" r:id="rId16"/>
     <p:sldId id="266" r:id="rId17"/>
+    <p:sldId id="267" r:id="rId18"/>
   </p:sldIdLst>
   <p:sldSz cx="12191695" cy="6858000" type="screen4x3"/>
   <p:notesSz cx="6858000" cy="9144000"/>
@@ -5124,6 +5125,908 @@
 </p:sld>
 </file>
 
+<file path=ppt/slides/slide12.xml><?xml version="1.0" encoding="utf-8"?>
+<p:sld xmlns:a="http://schemas.openxmlformats.org/drawingml/2006/main" xmlns:p="http://schemas.openxmlformats.org/presentationml/2006/main" xmlns:r="http://schemas.openxmlformats.org/officeDocument/2006/relationships">
+  <p:cSld>
+    <p:spTree>
+      <p:nvGrpSpPr>
+        <p:cNvPr id="1" name=""/>
+        <p:cNvGrpSpPr/>
+        <p:nvPr/>
+      </p:nvGrpSpPr>
+      <p:grpSpPr/>
+      <p:sp>
+        <p:nvSpPr>
+          <p:cNvPr id="2" name="Rectangle 1"/>
+          <p:cNvSpPr/>
+          <p:nvPr/>
+        </p:nvSpPr>
+        <p:spPr>
+          <a:xfrm>
+            <a:off x="0" y="0"/>
+            <a:ext cx="12191695" cy="1051560"/>
+          </a:xfrm>
+          <a:prstGeom prst="rect">
+            <a:avLst/>
+          </a:prstGeom>
+          <a:solidFill>
+            <a:srgbClr val="191823"/>
+          </a:solidFill>
+          <a:ln>
+            <a:noFill/>
+          </a:ln>
+          <a:effectLst/>
+        </p:spPr>
+        <p:style>
+          <a:lnRef idx="1">
+            <a:schemeClr val="accent1"/>
+          </a:lnRef>
+          <a:fillRef idx="3">
+            <a:schemeClr val="accent1"/>
+          </a:fillRef>
+          <a:effectRef idx="2">
+            <a:schemeClr val="accent1"/>
+          </a:effectRef>
+          <a:fontRef idx="minor">
+            <a:schemeClr val="lt1"/>
+          </a:fontRef>
+        </p:style>
+        <p:txBody>
+          <a:bodyPr rtlCol="0" anchor="ctr"/>
+          <a:lstStyle/>
+          <a:p>
+            <a:pPr algn="ctr"/>
+          </a:p>
+        </p:txBody>
+      </p:sp>
+      <p:sp>
+        <p:nvSpPr>
+          <p:cNvPr id="3" name="TextBox 2"/>
+          <p:cNvSpPr txBox="1"/>
+          <p:nvPr/>
+        </p:nvSpPr>
+        <p:spPr>
+          <a:xfrm>
+            <a:off x="548640" y="164592"/>
+            <a:ext cx="8686800" cy="822960"/>
+          </a:xfrm>
+          <a:prstGeom prst="rect">
+            <a:avLst/>
+          </a:prstGeom>
+          <a:noFill/>
+        </p:spPr>
+        <p:txBody>
+          <a:bodyPr wrap="square" anchor="t">
+            <a:spAutoFit/>
+          </a:bodyPr>
+          <a:lstStyle/>
+          <a:p>
+            <a:pPr algn="l">
+              <a:spcAft>
+                <a:spcPts val="200"/>
+              </a:spcAft>
+            </a:pPr>
+            <a:r>
+              <a:rPr sz="2400" b="1">
+                <a:solidFill>
+                  <a:srgbClr val="FFFFFF"/>
+                </a:solidFill>
+                <a:latin typeface="Arial"/>
+              </a:rPr>
+              <a:t>해외장기체류보험</a:t>
+            </a:r>
+          </a:p>
+          <a:p>
+            <a:pPr algn="l">
+              <a:spcAft>
+                <a:spcPts val="200"/>
+              </a:spcAft>
+            </a:pPr>
+            <a:r>
+              <a:rPr sz="1050" b="0">
+                <a:solidFill>
+                  <a:srgbClr val="C9C6D4"/>
+                </a:solidFill>
+                <a:latin typeface="Arial"/>
+              </a:rPr>
+              <a:t>한화손보 캐롯  ·  캐롯 분기  ·  https://m.hanwhadirect.com/cmcom/carrotBridge.do?carrot=overseas-long</a:t>
+            </a:r>
+          </a:p>
+        </p:txBody>
+      </p:sp>
+      <p:sp>
+        <p:nvSpPr>
+          <p:cNvPr id="4" name="Rectangle 3"/>
+          <p:cNvSpPr/>
+          <p:nvPr/>
+        </p:nvSpPr>
+        <p:spPr>
+          <a:xfrm>
+            <a:off x="9692640" y="292608"/>
+            <a:ext cx="1005840" cy="502920"/>
+          </a:xfrm>
+          <a:prstGeom prst="rect">
+            <a:avLst/>
+          </a:prstGeom>
+          <a:solidFill>
+            <a:srgbClr val="26232F"/>
+          </a:solidFill>
+          <a:ln>
+            <a:noFill/>
+          </a:ln>
+          <a:effectLst/>
+        </p:spPr>
+        <p:style>
+          <a:lnRef idx="1">
+            <a:schemeClr val="accent1"/>
+          </a:lnRef>
+          <a:fillRef idx="3">
+            <a:schemeClr val="accent1"/>
+          </a:fillRef>
+          <a:effectRef idx="2">
+            <a:schemeClr val="accent1"/>
+          </a:effectRef>
+          <a:fontRef idx="minor">
+            <a:schemeClr val="lt1"/>
+          </a:fontRef>
+        </p:style>
+        <p:txBody>
+          <a:bodyPr rtlCol="0" anchor="ctr"/>
+          <a:lstStyle/>
+          <a:p>
+            <a:pPr algn="ctr"/>
+          </a:p>
+        </p:txBody>
+      </p:sp>
+      <p:sp>
+        <p:nvSpPr>
+          <p:cNvPr id="5" name="TextBox 4"/>
+          <p:cNvSpPr txBox="1"/>
+          <p:nvPr/>
+        </p:nvSpPr>
+        <p:spPr>
+          <a:xfrm>
+            <a:off x="9692640" y="274320"/>
+            <a:ext cx="1005840" cy="502920"/>
+          </a:xfrm>
+          <a:prstGeom prst="rect">
+            <a:avLst/>
+          </a:prstGeom>
+          <a:noFill/>
+        </p:spPr>
+        <p:txBody>
+          <a:bodyPr wrap="square" anchor="ctr">
+            <a:spAutoFit/>
+          </a:bodyPr>
+          <a:lstStyle/>
+          <a:p>
+            <a:pPr algn="ctr">
+              <a:spcAft>
+                <a:spcPts val="200"/>
+              </a:spcAft>
+            </a:pPr>
+            <a:r>
+              <a:rPr sz="1200" b="1">
+                <a:solidFill>
+                  <a:srgbClr val="F0A63F"/>
+                </a:solidFill>
+                <a:latin typeface="Arial"/>
+              </a:rPr>
+              <a:t>구글 64</a:t>
+            </a:r>
+          </a:p>
+        </p:txBody>
+      </p:sp>
+      <p:sp>
+        <p:nvSpPr>
+          <p:cNvPr id="6" name="Rectangle 5"/>
+          <p:cNvSpPr/>
+          <p:nvPr/>
+        </p:nvSpPr>
+        <p:spPr>
+          <a:xfrm>
+            <a:off x="10835640" y="292608"/>
+            <a:ext cx="1005840" cy="502920"/>
+          </a:xfrm>
+          <a:prstGeom prst="rect">
+            <a:avLst/>
+          </a:prstGeom>
+          <a:solidFill>
+            <a:srgbClr val="26232F"/>
+          </a:solidFill>
+          <a:ln>
+            <a:noFill/>
+          </a:ln>
+          <a:effectLst/>
+        </p:spPr>
+        <p:style>
+          <a:lnRef idx="1">
+            <a:schemeClr val="accent1"/>
+          </a:lnRef>
+          <a:fillRef idx="3">
+            <a:schemeClr val="accent1"/>
+          </a:fillRef>
+          <a:effectRef idx="2">
+            <a:schemeClr val="accent1"/>
+          </a:effectRef>
+          <a:fontRef idx="minor">
+            <a:schemeClr val="lt1"/>
+          </a:fontRef>
+        </p:style>
+        <p:txBody>
+          <a:bodyPr rtlCol="0" anchor="ctr"/>
+          <a:lstStyle/>
+          <a:p>
+            <a:pPr algn="ctr"/>
+          </a:p>
+        </p:txBody>
+      </p:sp>
+      <p:sp>
+        <p:nvSpPr>
+          <p:cNvPr id="7" name="TextBox 6"/>
+          <p:cNvSpPr txBox="1"/>
+          <p:nvPr/>
+        </p:nvSpPr>
+        <p:spPr>
+          <a:xfrm>
+            <a:off x="10835640" y="274320"/>
+            <a:ext cx="1005840" cy="502920"/>
+          </a:xfrm>
+          <a:prstGeom prst="rect">
+            <a:avLst/>
+          </a:prstGeom>
+          <a:noFill/>
+        </p:spPr>
+        <p:txBody>
+          <a:bodyPr wrap="square" anchor="ctr">
+            <a:spAutoFit/>
+          </a:bodyPr>
+          <a:lstStyle/>
+          <a:p>
+            <a:pPr algn="ctr">
+              <a:spcAft>
+                <a:spcPts val="200"/>
+              </a:spcAft>
+            </a:pPr>
+            <a:r>
+              <a:rPr sz="1200" b="1">
+                <a:solidFill>
+                  <a:srgbClr val="F0A63F"/>
+                </a:solidFill>
+                <a:latin typeface="Arial"/>
+              </a:rPr>
+              <a:t>네이버 63</a:t>
+            </a:r>
+          </a:p>
+        </p:txBody>
+      </p:sp>
+      <p:sp>
+        <p:nvSpPr>
+          <p:cNvPr id="8" name="TextBox 7"/>
+          <p:cNvSpPr txBox="1"/>
+          <p:nvPr/>
+        </p:nvSpPr>
+        <p:spPr>
+          <a:xfrm>
+            <a:off x="548640" y="1234440"/>
+            <a:ext cx="11064240" cy="548640"/>
+          </a:xfrm>
+          <a:prstGeom prst="rect">
+            <a:avLst/>
+          </a:prstGeom>
+          <a:noFill/>
+        </p:spPr>
+        <p:txBody>
+          <a:bodyPr wrap="square" anchor="t">
+            <a:spAutoFit/>
+          </a:bodyPr>
+          <a:lstStyle/>
+          <a:p>
+            <a:pPr algn="l">
+              <a:spcAft>
+                <a:spcPts val="0"/>
+              </a:spcAft>
+            </a:pPr>
+            <a:r>
+              <a:rPr sz="1100" b="1">
+                <a:solidFill>
+                  <a:srgbClr val="8A8EA0"/>
+                </a:solidFill>
+                <a:latin typeface="Arial"/>
+              </a:rPr>
+              <a:t>권장 메인 타이틀  </a:t>
+            </a:r>
+          </a:p>
+        </p:txBody>
+      </p:sp>
+      <p:sp>
+        <p:nvSpPr>
+          <p:cNvPr id="9" name="Rectangle 8"/>
+          <p:cNvSpPr/>
+          <p:nvPr/>
+        </p:nvSpPr>
+        <p:spPr>
+          <a:xfrm>
+            <a:off x="548640" y="1572768"/>
+            <a:ext cx="11064240" cy="457200"/>
+          </a:xfrm>
+          <a:prstGeom prst="rect">
+            <a:avLst/>
+          </a:prstGeom>
+          <a:solidFill>
+            <a:srgbClr val="FBF5EC"/>
+          </a:solidFill>
+          <a:ln w="9525">
+            <a:solidFill>
+              <a:srgbClr val="E0850F"/>
+            </a:solidFill>
+          </a:ln>
+          <a:effectLst/>
+        </p:spPr>
+        <p:style>
+          <a:lnRef idx="1">
+            <a:schemeClr val="accent1"/>
+          </a:lnRef>
+          <a:fillRef idx="3">
+            <a:schemeClr val="accent1"/>
+          </a:fillRef>
+          <a:effectRef idx="2">
+            <a:schemeClr val="accent1"/>
+          </a:effectRef>
+          <a:fontRef idx="minor">
+            <a:schemeClr val="lt1"/>
+          </a:fontRef>
+        </p:style>
+        <p:txBody>
+          <a:bodyPr rtlCol="0" anchor="ctr"/>
+          <a:lstStyle/>
+          <a:p>
+            <a:pPr algn="ctr"/>
+          </a:p>
+        </p:txBody>
+      </p:sp>
+      <p:sp>
+        <p:nvSpPr>
+          <p:cNvPr id="10" name="TextBox 9"/>
+          <p:cNvSpPr txBox="1"/>
+          <p:nvPr/>
+        </p:nvSpPr>
+        <p:spPr>
+          <a:xfrm>
+            <a:off x="685800" y="1609344"/>
+            <a:ext cx="10789920" cy="411480"/>
+          </a:xfrm>
+          <a:prstGeom prst="rect">
+            <a:avLst/>
+          </a:prstGeom>
+          <a:noFill/>
+        </p:spPr>
+        <p:txBody>
+          <a:bodyPr wrap="square" anchor="ctr">
+            <a:spAutoFit/>
+          </a:bodyPr>
+          <a:lstStyle/>
+          <a:p>
+            <a:pPr algn="l">
+              <a:spcAft>
+                <a:spcPts val="200"/>
+              </a:spcAft>
+            </a:pPr>
+            <a:r>
+              <a:rPr sz="1300" b="1">
+                <a:solidFill>
+                  <a:srgbClr val="B96B08"/>
+                </a:solidFill>
+                <a:latin typeface="Arial"/>
+              </a:rPr>
+              <a:t>한화손보 캐롯 해외장기체류보험 | 유학·장기체류 보장</a:t>
+            </a:r>
+          </a:p>
+        </p:txBody>
+      </p:sp>
+      <p:graphicFrame>
+        <p:nvGraphicFramePr>
+          <p:cNvPr id="11" name="Table 10"/>
+          <p:cNvGraphicFramePr>
+            <a:graphicFrameLocks noGrp="1"/>
+          </p:cNvGraphicFramePr>
+          <p:nvPr/>
+        </p:nvGraphicFramePr>
+        <p:xfrm>
+          <a:off x="548640" y="2240280"/>
+          <a:ext cx="11064240" cy="274320"/>
+        </p:xfrm>
+        <a:graphic>
+          <a:graphicData uri="http://schemas.openxmlformats.org/drawingml/2006/table">
+            <a:tbl>
+              <a:tblPr firstRow="1" bandRow="1">
+                <a:tableStyleId>{5C22544A-7EE6-4342-B048-85BDC9FD1C3A}</a:tableStyleId>
+              </a:tblPr>
+              <a:tblGrid>
+                <a:gridCol w="868680"/>
+                <a:gridCol w="3108960"/>
+                <a:gridCol w="7086600"/>
+              </a:tblGrid>
+              <a:tr h="45720">
+                <a:tc>
+                  <a:txBody>
+                    <a:bodyPr/>
+                    <a:lstStyle/>
+                    <a:p>
+                      <a:r>
+                        <a:rPr sz="1050" b="1">
+                          <a:solidFill>
+                            <a:srgbClr val="FFFFFF"/>
+                          </a:solidFill>
+                          <a:latin typeface="Arial"/>
+                        </a:rPr>
+                        <a:t>우선</a:t>
+                      </a:r>
+                    </a:p>
+                  </a:txBody>
+                  <a:tcPr>
+                    <a:solidFill>
+                      <a:srgbClr val="E0850F"/>
+                    </a:solidFill>
+                  </a:tcPr>
+                </a:tc>
+                <a:tc>
+                  <a:txBody>
+                    <a:bodyPr/>
+                    <a:lstStyle/>
+                    <a:p>
+                      <a:r>
+                        <a:rPr sz="1050" b="1">
+                          <a:solidFill>
+                            <a:srgbClr val="FFFFFF"/>
+                          </a:solidFill>
+                          <a:latin typeface="Arial"/>
+                        </a:rPr>
+                        <a:t>태그 항목</a:t>
+                      </a:r>
+                    </a:p>
+                  </a:txBody>
+                  <a:tcPr>
+                    <a:solidFill>
+                      <a:srgbClr val="E0850F"/>
+                    </a:solidFill>
+                  </a:tcPr>
+                </a:tc>
+                <a:tc>
+                  <a:txBody>
+                    <a:bodyPr/>
+                    <a:lstStyle/>
+                    <a:p>
+                      <a:r>
+                        <a:rPr sz="1050" b="1">
+                          <a:solidFill>
+                            <a:srgbClr val="FFFFFF"/>
+                          </a:solidFill>
+                          <a:latin typeface="Arial"/>
+                        </a:rPr>
+                        <a:t>권장 (After)</a:t>
+                      </a:r>
+                    </a:p>
+                  </a:txBody>
+                  <a:tcPr>
+                    <a:solidFill>
+                      <a:srgbClr val="E0850F"/>
+                    </a:solidFill>
+                  </a:tcPr>
+                </a:tc>
+              </a:tr>
+              <a:tr h="45720">
+                <a:tc>
+                  <a:txBody>
+                    <a:bodyPr/>
+                    <a:lstStyle/>
+                    <a:p>
+                      <a:pPr algn="ctr"/>
+                      <a:r>
+                        <a:rPr sz="1000" b="1">
+                          <a:solidFill>
+                            <a:srgbClr val="FFFFFF"/>
+                          </a:solidFill>
+                          <a:latin typeface="Arial"/>
+                        </a:rPr>
+                        <a:t>상</a:t>
+                      </a:r>
+                    </a:p>
+                  </a:txBody>
+                  <a:tcPr marT="25400" marB="25400" anchor="ctr">
+                    <a:solidFill>
+                      <a:srgbClr val="E5484D"/>
+                    </a:solidFill>
+                  </a:tcPr>
+                </a:tc>
+                <a:tc>
+                  <a:txBody>
+                    <a:bodyPr/>
+                    <a:lstStyle/>
+                    <a:p>
+                      <a:r>
+                        <a:rPr sz="950">
+                          <a:solidFill>
+                            <a:srgbClr val="1E1E2C"/>
+                          </a:solidFill>
+                          <a:latin typeface="Arial"/>
+                        </a:rPr>
+                        <a:t>&lt;meta name="description"&gt; 신설/교체</a:t>
+                      </a:r>
+                    </a:p>
+                  </a:txBody>
+                  <a:tcPr marT="25400" marB="25400" anchor="ctr">
+                    <a:solidFill>
+                      <a:srgbClr val="FFFFFF"/>
+                    </a:solidFill>
+                  </a:tcPr>
+                </a:tc>
+                <a:tc>
+                  <a:txBody>
+                    <a:bodyPr/>
+                    <a:lstStyle/>
+                    <a:p>
+                      <a:r>
+                        <a:rPr sz="800">
+                          <a:solidFill>
+                            <a:srgbClr val="2B2B40"/>
+                          </a:solidFill>
+                          <a:latin typeface="Consolas"/>
+                        </a:rPr>
+                        <a:t>&lt;meta name="description" content="3개월 초과 해외체류·유학 중 질병·상해 의료비를 최대 10만달러까지. 한화손보 캐롯 해외장기체류보험을 온라인에서 확인하세요."&gt;</a:t>
+                      </a:r>
+                    </a:p>
+                  </a:txBody>
+                  <a:tcPr marT="25400" marB="25400" anchor="ctr">
+                    <a:solidFill>
+                      <a:srgbClr val="F7F6F2"/>
+                    </a:solidFill>
+                  </a:tcPr>
+                </a:tc>
+              </a:tr>
+              <a:tr h="45720">
+                <a:tc>
+                  <a:txBody>
+                    <a:bodyPr/>
+                    <a:lstStyle/>
+                    <a:p>
+                      <a:pPr algn="ctr"/>
+                      <a:r>
+                        <a:rPr sz="1000" b="1">
+                          <a:solidFill>
+                            <a:srgbClr val="FFFFFF"/>
+                          </a:solidFill>
+                          <a:latin typeface="Arial"/>
+                        </a:rPr>
+                        <a:t>상</a:t>
+                      </a:r>
+                    </a:p>
+                  </a:txBody>
+                  <a:tcPr marT="25400" marB="25400" anchor="ctr">
+                    <a:solidFill>
+                      <a:srgbClr val="E5484D"/>
+                    </a:solidFill>
+                  </a:tcPr>
+                </a:tc>
+                <a:tc>
+                  <a:txBody>
+                    <a:bodyPr/>
+                    <a:lstStyle/>
+                    <a:p>
+                      <a:r>
+                        <a:rPr sz="950">
+                          <a:solidFill>
+                            <a:srgbClr val="1E1E2C"/>
+                          </a:solidFill>
+                          <a:latin typeface="Arial"/>
+                        </a:rPr>
+                        <a:t>분기(carrotBridge) 색인·canonical 정리</a:t>
+                      </a:r>
+                    </a:p>
+                  </a:txBody>
+                  <a:tcPr marT="25400" marB="25400" anchor="ctr">
+                    <a:solidFill>
+                      <a:srgbClr val="FFFFFF"/>
+                    </a:solidFill>
+                  </a:tcPr>
+                </a:tc>
+                <a:tc>
+                  <a:txBody>
+                    <a:bodyPr/>
+                    <a:lstStyle/>
+                    <a:p>
+                      <a:r>
+                        <a:rPr sz="800">
+                          <a:solidFill>
+                            <a:srgbClr val="2B2B40"/>
+                          </a:solidFill>
+                          <a:latin typeface="Consolas"/>
+                        </a:rPr>
+                        <a:t>&lt;!-- 목적지가 정본이면 301 + canonical 통일 --&gt;</a:t>
+                      </a:r>
+                    </a:p>
+                    <a:p>
+                      <a:r>
+                        <a:rPr sz="800">
+                          <a:solidFill>
+                            <a:srgbClr val="2B2B40"/>
+                          </a:solidFill>
+                          <a:latin typeface="Consolas"/>
+                        </a:rPr>
+                        <a:t>&lt;link rel="canonical" href="https://www.carrotins.com/product/overseas-long/intro"&gt;</a:t>
+                      </a:r>
+                    </a:p>
+                    <a:p>
+                      <a:r>
+                        <a:rPr sz="800">
+                          <a:solidFill>
+                            <a:srgbClr val="2B2B40"/>
+                          </a:solidFill>
+                          <a:latin typeface="Consolas"/>
+                        </a:rPr>
+                        <a:t>&lt;!-- 또는 CM이 랭킹 확보시 hanwhadirect에 상품 콘텐츠 랜딩 신설 --&gt;</a:t>
+                      </a:r>
+                    </a:p>
+                  </a:txBody>
+                  <a:tcPr marT="25400" marB="25400" anchor="ctr">
+                    <a:solidFill>
+                      <a:srgbClr val="F7F6F2"/>
+                    </a:solidFill>
+                  </a:tcPr>
+                </a:tc>
+              </a:tr>
+              <a:tr h="45720">
+                <a:tc>
+                  <a:txBody>
+                    <a:bodyPr/>
+                    <a:lstStyle/>
+                    <a:p>
+                      <a:pPr algn="ctr"/>
+                      <a:r>
+                        <a:rPr sz="1000" b="1">
+                          <a:solidFill>
+                            <a:srgbClr val="FFFFFF"/>
+                          </a:solidFill>
+                          <a:latin typeface="Arial"/>
+                        </a:rPr>
+                        <a:t>중</a:t>
+                      </a:r>
+                    </a:p>
+                  </a:txBody>
+                  <a:tcPr marT="25400" marB="25400" anchor="ctr">
+                    <a:solidFill>
+                      <a:srgbClr val="C47F12"/>
+                    </a:solidFill>
+                  </a:tcPr>
+                </a:tc>
+                <a:tc>
+                  <a:txBody>
+                    <a:bodyPr/>
+                    <a:lstStyle/>
+                    <a:p>
+                      <a:r>
+                        <a:rPr sz="950">
+                          <a:solidFill>
+                            <a:srgbClr val="1E1E2C"/>
+                          </a:solidFill>
+                          <a:latin typeface="Arial"/>
+                        </a:rPr>
+                        <a:t>&lt;title&gt; 교체</a:t>
+                      </a:r>
+                    </a:p>
+                  </a:txBody>
+                  <a:tcPr marT="25400" marB="25400" anchor="ctr">
+                    <a:solidFill>
+                      <a:srgbClr val="FFFFFF"/>
+                    </a:solidFill>
+                  </a:tcPr>
+                </a:tc>
+                <a:tc>
+                  <a:txBody>
+                    <a:bodyPr/>
+                    <a:lstStyle/>
+                    <a:p>
+                      <a:r>
+                        <a:rPr sz="800">
+                          <a:solidFill>
+                            <a:srgbClr val="2B2B40"/>
+                          </a:solidFill>
+                          <a:latin typeface="Consolas"/>
+                        </a:rPr>
+                        <a:t>&lt;title&gt;한화손보 캐롯 해외장기체류보험 | 유학·장기체류 보장&lt;/title&gt;</a:t>
+                      </a:r>
+                    </a:p>
+                  </a:txBody>
+                  <a:tcPr marT="25400" marB="25400" anchor="ctr">
+                    <a:solidFill>
+                      <a:srgbClr val="F7F6F2"/>
+                    </a:solidFill>
+                  </a:tcPr>
+                </a:tc>
+              </a:tr>
+              <a:tr h="45720">
+                <a:tc>
+                  <a:txBody>
+                    <a:bodyPr/>
+                    <a:lstStyle/>
+                    <a:p>
+                      <a:pPr algn="ctr"/>
+                      <a:r>
+                        <a:rPr sz="1000" b="1">
+                          <a:solidFill>
+                            <a:srgbClr val="FFFFFF"/>
+                          </a:solidFill>
+                          <a:latin typeface="Arial"/>
+                        </a:rPr>
+                        <a:t>하</a:t>
+                      </a:r>
+                    </a:p>
+                  </a:txBody>
+                  <a:tcPr marT="25400" marB="25400" anchor="ctr">
+                    <a:solidFill>
+                      <a:srgbClr val="8A8EA0"/>
+                    </a:solidFill>
+                  </a:tcPr>
+                </a:tc>
+                <a:tc>
+                  <a:txBody>
+                    <a:bodyPr/>
+                    <a:lstStyle/>
+                    <a:p>
+                      <a:r>
+                        <a:rPr sz="950">
+                          <a:solidFill>
+                            <a:srgbClr val="1E1E2C"/>
+                          </a:solidFill>
+                          <a:latin typeface="Arial"/>
+                        </a:rPr>
+                        <a:t>OG 태그 세트 추가/점검</a:t>
+                      </a:r>
+                    </a:p>
+                  </a:txBody>
+                  <a:tcPr marT="25400" marB="25400" anchor="ctr">
+                    <a:solidFill>
+                      <a:srgbClr val="FFFFFF"/>
+                    </a:solidFill>
+                  </a:tcPr>
+                </a:tc>
+                <a:tc>
+                  <a:txBody>
+                    <a:bodyPr/>
+                    <a:lstStyle/>
+                    <a:p>
+                      <a:r>
+                        <a:rPr sz="800">
+                          <a:solidFill>
+                            <a:srgbClr val="2B2B40"/>
+                          </a:solidFill>
+                          <a:latin typeface="Consolas"/>
+                        </a:rPr>
+                        <a:t>&lt;meta property="og:title" content="유학·장기출장 전 필수 — 한화손보 캐롯 해외장기체류보험"&gt;</a:t>
+                      </a:r>
+                    </a:p>
+                    <a:p>
+                      <a:r>
+                        <a:rPr sz="800">
+                          <a:solidFill>
+                            <a:srgbClr val="2B2B40"/>
+                          </a:solidFill>
+                          <a:latin typeface="Consolas"/>
+                        </a:rPr>
+                        <a:t>&lt;meta property="og:description" content="3개월 넘는 해외체류, 현지 의료비까지 대비하는 장기체류보험. 개인정보 없이 보험료를 확인해요."&gt;</a:t>
+                      </a:r>
+                    </a:p>
+                    <a:p>
+                      <a:r>
+                        <a:rPr sz="800">
+                          <a:solidFill>
+                            <a:srgbClr val="2B2B40"/>
+                          </a:solidFill>
+                          <a:latin typeface="Consolas"/>
+                        </a:rPr>
+                        <a:t>&lt;meta property="og:image" content="https://.../og/overseaslong_1200x630.png"&gt;</a:t>
+                      </a:r>
+                    </a:p>
+                    <a:p>
+                      <a:r>
+                        <a:rPr sz="800">
+                          <a:solidFill>
+                            <a:srgbClr val="2B2B40"/>
+                          </a:solidFill>
+                          <a:latin typeface="Consolas"/>
+                        </a:rPr>
+                        <a:t>&lt;meta property="og:url" content="https://www.carrotins.com/product/overseas-long/intro"&gt;</a:t>
+                      </a:r>
+                    </a:p>
+                  </a:txBody>
+                  <a:tcPr marT="25400" marB="25400" anchor="ctr">
+                    <a:solidFill>
+                      <a:srgbClr val="F7F6F2"/>
+                    </a:solidFill>
+                  </a:tcPr>
+                </a:tc>
+              </a:tr>
+              <a:tr h="45720">
+                <a:tc>
+                  <a:txBody>
+                    <a:bodyPr/>
+                    <a:lstStyle/>
+                    <a:p>
+                      <a:pPr algn="ctr"/>
+                      <a:r>
+                        <a:rPr sz="1000" b="1">
+                          <a:solidFill>
+                            <a:srgbClr val="FFFFFF"/>
+                          </a:solidFill>
+                          <a:latin typeface="Arial"/>
+                        </a:rPr>
+                        <a:t>하</a:t>
+                      </a:r>
+                    </a:p>
+                  </a:txBody>
+                  <a:tcPr marT="25400" marB="25400" anchor="ctr">
+                    <a:solidFill>
+                      <a:srgbClr val="8A8EA0"/>
+                    </a:solidFill>
+                  </a:tcPr>
+                </a:tc>
+                <a:tc>
+                  <a:txBody>
+                    <a:bodyPr/>
+                    <a:lstStyle/>
+                    <a:p>
+                      <a:r>
+                        <a:rPr sz="950">
+                          <a:solidFill>
+                            <a:srgbClr val="1E1E2C"/>
+                          </a:solidFill>
+                          <a:latin typeface="Arial"/>
+                        </a:rPr>
+                        <a:t>상품 이미지 alt 텍스트 보강</a:t>
+                      </a:r>
+                    </a:p>
+                  </a:txBody>
+                  <a:tcPr marT="25400" marB="25400" anchor="ctr">
+                    <a:solidFill>
+                      <a:srgbClr val="FFFFFF"/>
+                    </a:solidFill>
+                  </a:tcPr>
+                </a:tc>
+                <a:tc>
+                  <a:txBody>
+                    <a:bodyPr/>
+                    <a:lstStyle/>
+                    <a:p>
+                      <a:r>
+                        <a:rPr sz="800">
+                          <a:solidFill>
+                            <a:srgbClr val="2B2B40"/>
+                          </a:solidFill>
+                          <a:latin typeface="Consolas"/>
+                        </a:rPr>
+                        <a:t>&lt;img src="/img/overseaslong_cover.png" alt="해외장기체류보험 보장내용 안내"&gt;</a:t>
+                      </a:r>
+                    </a:p>
+                  </a:txBody>
+                  <a:tcPr marT="25400" marB="25400" anchor="ctr">
+                    <a:solidFill>
+                      <a:srgbClr val="F7F6F2"/>
+                    </a:solidFill>
+                  </a:tcPr>
+                </a:tc>
+              </a:tr>
+            </a:tbl>
+          </a:graphicData>
+        </a:graphic>
+      </p:graphicFrame>
+    </p:spTree>
+  </p:cSld>
+  <p:clrMapOvr>
+    <a:masterClrMapping/>
+  </p:clrMapOvr>
+</p:sld>
+</file>
+
 <file path=ppt/slides/slide2.xml><?xml version="1.0" encoding="utf-8"?>
 <p:sld xmlns:a="http://schemas.openxmlformats.org/drawingml/2006/main" xmlns:p="http://schemas.openxmlformats.org/presentationml/2006/main" xmlns:r="http://schemas.openxmlformats.org/officeDocument/2006/relationships">
   <p:cSld>
@@ -5266,7 +6169,7 @@
         </p:nvGraphicFramePr>
         <p:xfrm>
           <a:off x="548640" y="1737360"/>
-          <a:ext cx="7680960" cy="3840480"/>
+          <a:ext cx="7680960" cy="4224528"/>
         </p:xfrm>
         <a:graphic>
           <a:graphicData uri="http://schemas.openxmlformats.org/drawingml/2006/table">
@@ -6216,6 +7119,100 @@
                   <a:tcPr>
                     <a:solidFill>
                       <a:srgbClr val="FFFFFF"/>
+                    </a:solidFill>
+                  </a:tcPr>
+                </a:tc>
+              </a:tr>
+              <a:tr h="384048">
+                <a:tc>
+                  <a:txBody>
+                    <a:bodyPr/>
+                    <a:lstStyle/>
+                    <a:p>
+                      <a:pPr algn="l"/>
+                      <a:r>
+                        <a:rPr sz="1100" b="1">
+                          <a:solidFill>
+                            <a:srgbClr val="1E1E2C"/>
+                          </a:solidFill>
+                          <a:latin typeface="Arial"/>
+                        </a:rPr>
+                        <a:t>해외장기체류보험</a:t>
+                      </a:r>
+                    </a:p>
+                  </a:txBody>
+                  <a:tcPr>
+                    <a:solidFill>
+                      <a:srgbClr val="FAF9F6"/>
+                    </a:solidFill>
+                  </a:tcPr>
+                </a:tc>
+                <a:tc>
+                  <a:txBody>
+                    <a:bodyPr/>
+                    <a:lstStyle/>
+                    <a:p>
+                      <a:pPr algn="ctr"/>
+                      <a:r>
+                        <a:rPr sz="1100" b="0">
+                          <a:solidFill>
+                            <a:srgbClr val="1E1E2C"/>
+                          </a:solidFill>
+                          <a:latin typeface="Arial"/>
+                        </a:rPr>
+                        <a:t>캐롯 분기</a:t>
+                      </a:r>
+                    </a:p>
+                  </a:txBody>
+                  <a:tcPr>
+                    <a:solidFill>
+                      <a:srgbClr val="FAF9F6"/>
+                    </a:solidFill>
+                  </a:tcPr>
+                </a:tc>
+                <a:tc>
+                  <a:txBody>
+                    <a:bodyPr/>
+                    <a:lstStyle/>
+                    <a:p>
+                      <a:pPr algn="ctr"/>
+                      <a:r>
+                        <a:rPr sz="1100" b="1">
+                          <a:solidFill>
+                            <a:srgbClr val="C47F12"/>
+                          </a:solidFill>
+                          <a:latin typeface="Arial"/>
+                        </a:rPr>
+                        <a:t>64</a:t>
+                      </a:r>
+                    </a:p>
+                  </a:txBody>
+                  <a:tcPr>
+                    <a:solidFill>
+                      <a:srgbClr val="FAF9F6"/>
+                    </a:solidFill>
+                  </a:tcPr>
+                </a:tc>
+                <a:tc>
+                  <a:txBody>
+                    <a:bodyPr/>
+                    <a:lstStyle/>
+                    <a:p>
+                      <a:pPr algn="ctr"/>
+                      <a:r>
+                        <a:rPr sz="1100" b="1">
+                          <a:solidFill>
+                            <a:srgbClr val="C47F12"/>
+                          </a:solidFill>
+                          <a:latin typeface="Arial"/>
+                        </a:rPr>
+                        <a:t>63</a:t>
+                      </a:r>
+                    </a:p>
+                  </a:txBody>
+                  <a:tcPr>
+                    <a:solidFill>
+                      <a:srgbClr val="FAF9F6"/>
                     </a:solidFill>
                   </a:tcPr>
                 </a:tc>

--- a/handoff/한화손보_장기CM_태깅가이드.pptx
+++ b/handoff/한화손보_장기CM_태깅가이드.pptx
@@ -7871,13 +7871,13 @@
                           </a:solidFill>
                           <a:latin typeface="Arial"/>
                         </a:rPr>
-                        <a:t>중</a:t>
-                      </a:r>
-                    </a:p>
-                  </a:txBody>
-                  <a:tcPr marT="25400" marB="25400" anchor="ctr">
-                    <a:solidFill>
-                      <a:srgbClr val="C47F12"/>
+                        <a:t>상</a:t>
+                      </a:r>
+                    </a:p>
+                  </a:txBody>
+                  <a:tcPr marT="25400" marB="25400" anchor="ctr">
+                    <a:solidFill>
+                      <a:srgbClr val="E5484D"/>
                     </a:solidFill>
                   </a:tcPr>
                 </a:tc>
@@ -7893,7 +7893,7 @@
                           </a:solidFill>
                           <a:latin typeface="Arial"/>
                         </a:rPr>
-                        <a:t>OG 태그 세트 추가/점검</a:t>
+                        <a:t>robots.txt · sitemap.xml 설치/점검 (사이트 전체)</a:t>
                       </a:r>
                     </a:p>
                   </a:txBody>
@@ -7915,7 +7915,7 @@
                           </a:solidFill>
                           <a:latin typeface="Consolas"/>
                         </a:rPr>
-                        <a:t>&lt;meta property="og:title" content="한화손보다이렉트 — 필요한 보험을 한 곳에서"&gt;</a:t>
+                        <a:t># robots.txt (사이트 루트)</a:t>
                       </a:r>
                     </a:p>
                     <a:p>
@@ -7926,7 +7926,7 @@
                           </a:solidFill>
                           <a:latin typeface="Consolas"/>
                         </a:rPr>
-                        <a:t>&lt;meta property="og:description" content="장기보험을 개인정보 없이 3분 만에 비교하고 보험료를 확인해요."&gt;</a:t>
+                        <a:t>User-agent: Yeti</a:t>
                       </a:r>
                     </a:p>
                     <a:p>
@@ -7937,7 +7937,7 @@
                           </a:solidFill>
                           <a:latin typeface="Consolas"/>
                         </a:rPr>
-                        <a:t>&lt;meta property="og:image" content="https://.../og/home_1200x630.png"&gt;</a:t>
+                        <a:t>Allow: /</a:t>
                       </a:r>
                     </a:p>
                     <a:p>
@@ -7948,7 +7948,51 @@
                           </a:solidFill>
                           <a:latin typeface="Consolas"/>
                         </a:rPr>
-                        <a:t>&lt;meta property="og:url" content="https://m.hanwhadirect.com/"&gt;</a:t>
+                        <a:t>User-agent: Googlebot</a:t>
+                      </a:r>
+                    </a:p>
+                    <a:p>
+                      <a:r>
+                        <a:rPr sz="800">
+                          <a:solidFill>
+                            <a:srgbClr val="2B2B40"/>
+                          </a:solidFill>
+                          <a:latin typeface="Consolas"/>
+                        </a:rPr>
+                        <a:t>Allow: /</a:t>
+                      </a:r>
+                    </a:p>
+                    <a:p>
+                      <a:r>
+                        <a:rPr sz="800">
+                          <a:solidFill>
+                            <a:srgbClr val="2B2B40"/>
+                          </a:solidFill>
+                          <a:latin typeface="Consolas"/>
+                        </a:rPr>
+                        <a:t>User-agent: *</a:t>
+                      </a:r>
+                    </a:p>
+                    <a:p>
+                      <a:r>
+                        <a:rPr sz="800">
+                          <a:solidFill>
+                            <a:srgbClr val="2B2B40"/>
+                          </a:solidFill>
+                          <a:latin typeface="Consolas"/>
+                        </a:rPr>
+                        <a:t>Allow: /</a:t>
+                      </a:r>
+                    </a:p>
+                    <a:p>
+                      <a:r>
+                        <a:rPr sz="800">
+                          <a:solidFill>
+                            <a:srgbClr val="2B2B40"/>
+                          </a:solidFill>
+                          <a:latin typeface="Consolas"/>
+                        </a:rPr>
+                        <a:t>Sitemap: https://www.hanwhadirect.com/sitemap.xml</a:t>
                       </a:r>
                     </a:p>
                   </a:txBody>
@@ -7995,7 +8039,7 @@
                           </a:solidFill>
                           <a:latin typeface="Arial"/>
                         </a:rPr>
-                        <a:t>모바일(m.)·PC(www) 메타 일치 + canonical</a:t>
+                        <a:t>OG 태그 세트 추가/점검</a:t>
                       </a:r>
                     </a:p>
                   </a:txBody>
@@ -8017,7 +8061,7 @@
                           </a:solidFill>
                           <a:latin typeface="Consolas"/>
                         </a:rPr>
-                        <a:t>&lt;link rel="canonical" href="https://www.hanwhadirect.com/"&gt;</a:t>
+                        <a:t>&lt;meta property="og:title" content="한화손보다이렉트 — 필요한 보험을 한 곳에서"&gt;</a:t>
                       </a:r>
                     </a:p>
                     <a:p>
@@ -8028,7 +8072,29 @@
                           </a:solidFill>
                           <a:latin typeface="Consolas"/>
                         </a:rPr>
-                        <a:t>&lt;link rel="alternate" media="only screen and (max-width: 640px)" href="https://m.hanwhadirect.com/"&gt;</a:t>
+                        <a:t>&lt;meta property="og:description" content="장기보험을 개인정보 없이 3분 만에 비교하고 보험료를 확인해요."&gt;</a:t>
+                      </a:r>
+                    </a:p>
+                    <a:p>
+                      <a:r>
+                        <a:rPr sz="800">
+                          <a:solidFill>
+                            <a:srgbClr val="2B2B40"/>
+                          </a:solidFill>
+                          <a:latin typeface="Consolas"/>
+                        </a:rPr>
+                        <a:t>&lt;meta property="og:image" content="https://.../og/home_1200x630.png"&gt;</a:t>
+                      </a:r>
+                    </a:p>
+                    <a:p>
+                      <a:r>
+                        <a:rPr sz="800">
+                          <a:solidFill>
+                            <a:srgbClr val="2B2B40"/>
+                          </a:solidFill>
+                          <a:latin typeface="Consolas"/>
+                        </a:rPr>
+                        <a:t>&lt;meta property="og:url" content="https://m.hanwhadirect.com/"&gt;</a:t>
                       </a:r>
                     </a:p>
                   </a:txBody>
@@ -8075,7 +8141,7 @@
                           </a:solidFill>
                           <a:latin typeface="Arial"/>
                         </a:rPr>
-                        <a:t>사이트명·브랜드 구조화(WebSite/Organization)</a:t>
+                        <a:t>모바일(m.)·PC(www) 메타 일치 + canonical</a:t>
                       </a:r>
                     </a:p>
                   </a:txBody>
@@ -8097,7 +8163,18 @@
                           </a:solidFill>
                           <a:latin typeface="Consolas"/>
                         </a:rPr>
-                        <a:t>&lt;script type="application/ld+json"&gt;{"@context":"https://schema.org","@type":"WebSite","name":"한화손해보험 다이렉트","url":"https://www.hanwhadirect.com/"}&lt;/script&gt;</a:t>
+                        <a:t>&lt;link rel="canonical" href="https://www.hanwhadirect.com/"&gt;</a:t>
+                      </a:r>
+                    </a:p>
+                    <a:p>
+                      <a:r>
+                        <a:rPr sz="800">
+                          <a:solidFill>
+                            <a:srgbClr val="2B2B40"/>
+                          </a:solidFill>
+                          <a:latin typeface="Consolas"/>
+                        </a:rPr>
+                        <a:t>&lt;link rel="alternate" media="only screen and (max-width: 640px)" href="https://m.hanwhadirect.com/"&gt;</a:t>
                       </a:r>
                     </a:p>
                   </a:txBody>

--- a/handoff/한화손보_장기CM_태깅가이드.pptx
+++ b/handoff/한화손보_장기CM_태깅가이드.pptx
@@ -7982,6 +7982,94 @@
                           <a:latin typeface="Consolas"/>
                         </a:rPr>
                         <a:t>Allow: /</a:t>
+                      </a:r>
+                    </a:p>
+                    <a:p>
+                      <a:r>
+                        <a:rPr sz="800">
+                          <a:solidFill>
+                            <a:srgbClr val="2B2B40"/>
+                          </a:solidFill>
+                          <a:latin typeface="Consolas"/>
+                        </a:rPr>
+                        <a:t>Disallow: /cmcom/</a:t>
+                      </a:r>
+                    </a:p>
+                    <a:p>
+                      <a:r>
+                        <a:rPr sz="800">
+                          <a:solidFill>
+                            <a:srgbClr val="2B2B40"/>
+                          </a:solidFill>
+                          <a:latin typeface="Consolas"/>
+                        </a:rPr>
+                        <a:t>Disallow: /admin/</a:t>
+                      </a:r>
+                    </a:p>
+                    <a:p>
+                      <a:r>
+                        <a:rPr sz="800">
+                          <a:solidFill>
+                            <a:srgbClr val="2B2B40"/>
+                          </a:solidFill>
+                          <a:latin typeface="Consolas"/>
+                        </a:rPr>
+                        <a:t>Disallow: /manager/</a:t>
+                      </a:r>
+                    </a:p>
+                    <a:p>
+                      <a:r>
+                        <a:rPr sz="800">
+                          <a:solidFill>
+                            <a:srgbClr val="2B2B40"/>
+                          </a:solidFill>
+                          <a:latin typeface="Consolas"/>
+                        </a:rPr>
+                        <a:t>Disallow: /mng/</a:t>
+                      </a:r>
+                    </a:p>
+                    <a:p>
+                      <a:r>
+                        <a:rPr sz="800">
+                          <a:solidFill>
+                            <a:srgbClr val="2B2B40"/>
+                          </a:solidFill>
+                          <a:latin typeface="Consolas"/>
+                        </a:rPr>
+                        <a:t>Disallow: /search</a:t>
+                      </a:r>
+                    </a:p>
+                    <a:p>
+                      <a:r>
+                        <a:rPr sz="800">
+                          <a:solidFill>
+                            <a:srgbClr val="2B2B40"/>
+                          </a:solidFill>
+                          <a:latin typeface="Consolas"/>
+                        </a:rPr>
+                        <a:t>Disallow: /*?keyword=</a:t>
+                      </a:r>
+                    </a:p>
+                    <a:p>
+                      <a:r>
+                        <a:rPr sz="800">
+                          <a:solidFill>
+                            <a:srgbClr val="2B2B40"/>
+                          </a:solidFill>
+                          <a:latin typeface="Consolas"/>
+                        </a:rPr>
+                        <a:t>Disallow: /*?q=</a:t>
+                      </a:r>
+                    </a:p>
+                    <a:p>
+                      <a:r>
+                        <a:rPr sz="800">
+                          <a:solidFill>
+                            <a:srgbClr val="2B2B40"/>
+                          </a:solidFill>
+                          <a:latin typeface="Consolas"/>
+                        </a:rPr>
+                        <a:t>Sitemap: https://m.hanwhadirect.com/sitemap.xml</a:t>
                       </a:r>
                     </a:p>
                     <a:p>

--- a/handoff/한화손보_장기CM_태깅가이드.pptx
+++ b/handoff/한화손보_장기CM_태깅가이드.pptx
@@ -3985,7 +3985,7 @@
                           </a:solidFill>
                           <a:latin typeface="Arial"/>
                         </a:rPr>
-                        <a:t>분기(carrotBridge) 색인·canonical 정리</a:t>
+                        <a:t>분기(carrotBridge) 리다이렉트·canonical 정리</a:t>
                       </a:r>
                     </a:p>
                   </a:txBody>
@@ -4007,7 +4007,7 @@
                           </a:solidFill>
                           <a:latin typeface="Consolas"/>
                         </a:rPr>
-                        <a:t>&lt;!-- 목적지가 정본이면 301 + canonical 통일 --&gt;</a:t>
+                        <a:t>&lt;!-- 서버 HTTP 301(Location)로 이동 + 목적지 canonical 통일 --&gt;</a:t>
                       </a:r>
                     </a:p>
                     <a:p>
@@ -4818,7 +4818,7 @@
                           </a:solidFill>
                           <a:latin typeface="Arial"/>
                         </a:rPr>
-                        <a:t>분기(carrotBridge) 색인·canonical 정리</a:t>
+                        <a:t>분기(carrotBridge) 리다이렉트·canonical 정리</a:t>
                       </a:r>
                     </a:p>
                   </a:txBody>
@@ -4840,7 +4840,7 @@
                           </a:solidFill>
                           <a:latin typeface="Consolas"/>
                         </a:rPr>
-                        <a:t>&lt;!-- 목적지가 정본이면 301 + canonical 통일 --&gt;</a:t>
+                        <a:t>&lt;!-- 서버 HTTP 301(Location)로 이동 + 목적지 canonical 통일 --&gt;</a:t>
                       </a:r>
                     </a:p>
                     <a:p>
@@ -5720,7 +5720,7 @@
                           </a:solidFill>
                           <a:latin typeface="Arial"/>
                         </a:rPr>
-                        <a:t>분기(carrotBridge) 색인·canonical 정리</a:t>
+                        <a:t>분기(carrotBridge) 리다이렉트·canonical 정리</a:t>
                       </a:r>
                     </a:p>
                   </a:txBody>
@@ -5742,7 +5742,7 @@
                           </a:solidFill>
                           <a:latin typeface="Consolas"/>
                         </a:rPr>
-                        <a:t>&lt;!-- 목적지가 정본이면 301 + canonical 통일 --&gt;</a:t>
+                        <a:t>&lt;!-- 서버 HTTP 301(Location)로 이동 + 목적지 canonical 통일 --&gt;</a:t>
                       </a:r>
                     </a:p>
                     <a:p>
@@ -7651,7 +7651,7 @@
                 <a:gridCol w="3108960"/>
                 <a:gridCol w="7086600"/>
               </a:tblGrid>
-              <a:tr h="39188">
+              <a:tr h="27432">
                 <a:tc>
                   <a:txBody>
                     <a:bodyPr/>
@@ -7719,7 +7719,7 @@
                   </a:tcPr>
                 </a:tc>
               </a:tr>
-              <a:tr h="39188">
+              <a:tr h="27432">
                 <a:tc>
                   <a:txBody>
                     <a:bodyPr/>
@@ -7788,7 +7788,7 @@
                   </a:tcPr>
                 </a:tc>
               </a:tr>
-              <a:tr h="39188">
+              <a:tr h="27432">
                 <a:tc>
                   <a:txBody>
                     <a:bodyPr/>
@@ -7857,7 +7857,7 @@
                   </a:tcPr>
                 </a:tc>
               </a:tr>
-              <a:tr h="39188">
+              <a:tr h="27432">
                 <a:tc>
                   <a:txBody>
                     <a:bodyPr/>
@@ -7893,6 +7893,75 @@
                           </a:solidFill>
                           <a:latin typeface="Arial"/>
                         </a:rPr>
+                        <a:t>검색로봇(Yeti) 접근 차단 해제 (방화벽/서버)</a:t>
+                      </a:r>
+                    </a:p>
+                  </a:txBody>
+                  <a:tcPr marT="25400" marB="25400" anchor="ctr">
+                    <a:solidFill>
+                      <a:srgbClr val="FFFFFF"/>
+                    </a:solidFill>
+                  </a:tcPr>
+                </a:tc>
+                <a:tc>
+                  <a:txBody>
+                    <a:bodyPr/>
+                    <a:lstStyle/>
+                    <a:p>
+                      <a:r>
+                        <a:rPr sz="800">
+                          <a:solidFill>
+                            <a:srgbClr val="2B2B40"/>
+                          </a:solidFill>
+                          <a:latin typeface="Consolas"/>
+                        </a:rPr>
+                        <a:t># 방화벽/WAF·서버에서 Yeti·Googlebot·Daumoa UA 허용 → 정상 200 응답</a:t>
+                      </a:r>
+                    </a:p>
+                  </a:txBody>
+                  <a:tcPr marT="25400" marB="25400" anchor="ctr">
+                    <a:solidFill>
+                      <a:srgbClr val="F7F6F2"/>
+                    </a:solidFill>
+                  </a:tcPr>
+                </a:tc>
+              </a:tr>
+              <a:tr h="27432">
+                <a:tc>
+                  <a:txBody>
+                    <a:bodyPr/>
+                    <a:lstStyle/>
+                    <a:p>
+                      <a:pPr algn="ctr"/>
+                      <a:r>
+                        <a:rPr sz="1000" b="1">
+                          <a:solidFill>
+                            <a:srgbClr val="FFFFFF"/>
+                          </a:solidFill>
+                          <a:latin typeface="Arial"/>
+                        </a:rPr>
+                        <a:t>상</a:t>
+                      </a:r>
+                    </a:p>
+                  </a:txBody>
+                  <a:tcPr marT="25400" marB="25400" anchor="ctr">
+                    <a:solidFill>
+                      <a:srgbClr val="E5484D"/>
+                    </a:solidFill>
+                  </a:tcPr>
+                </a:tc>
+                <a:tc>
+                  <a:txBody>
+                    <a:bodyPr/>
+                    <a:lstStyle/>
+                    <a:p>
+                      <a:r>
+                        <a:rPr sz="950">
+                          <a:solidFill>
+                            <a:srgbClr val="1E1E2C"/>
+                          </a:solidFill>
+                          <a:latin typeface="Arial"/>
+                        </a:rPr>
                         <a:t>robots.txt · sitemap.xml 설치/점검 (사이트 전체)</a:t>
                       </a:r>
                     </a:p>
@@ -8091,7 +8160,7 @@
                   </a:tcPr>
                 </a:tc>
               </a:tr>
-              <a:tr h="39188">
+              <a:tr h="27432">
                 <a:tc>
                   <a:txBody>
                     <a:bodyPr/>
@@ -8193,7 +8262,7 @@
                   </a:tcPr>
                 </a:tc>
               </a:tr>
-              <a:tr h="39188">
+              <a:tr h="27432">
                 <a:tc>
                   <a:txBody>
                     <a:bodyPr/>
@@ -8273,7 +8342,145 @@
                   </a:tcPr>
                 </a:tc>
               </a:tr>
-              <a:tr h="39192">
+              <a:tr h="27432">
+                <a:tc>
+                  <a:txBody>
+                    <a:bodyPr/>
+                    <a:lstStyle/>
+                    <a:p>
+                      <a:pPr algn="ctr"/>
+                      <a:r>
+                        <a:rPr sz="1000" b="1">
+                          <a:solidFill>
+                            <a:srgbClr val="FFFFFF"/>
+                          </a:solidFill>
+                          <a:latin typeface="Arial"/>
+                        </a:rPr>
+                        <a:t>중</a:t>
+                      </a:r>
+                    </a:p>
+                  </a:txBody>
+                  <a:tcPr marT="25400" marB="25400" anchor="ctr">
+                    <a:solidFill>
+                      <a:srgbClr val="C47F12"/>
+                    </a:solidFill>
+                  </a:tcPr>
+                </a:tc>
+                <a:tc>
+                  <a:txBody>
+                    <a:bodyPr/>
+                    <a:lstStyle/>
+                    <a:p>
+                      <a:r>
+                        <a:rPr sz="950">
+                          <a:solidFill>
+                            <a:srgbClr val="1E1E2C"/>
+                          </a:solidFill>
+                          <a:latin typeface="Arial"/>
+                        </a:rPr>
+                        <a:t>로봇 메타태그 noindex 점검</a:t>
+                      </a:r>
+                    </a:p>
+                  </a:txBody>
+                  <a:tcPr marT="25400" marB="25400" anchor="ctr">
+                    <a:solidFill>
+                      <a:srgbClr val="FFFFFF"/>
+                    </a:solidFill>
+                  </a:tcPr>
+                </a:tc>
+                <a:tc>
+                  <a:txBody>
+                    <a:bodyPr/>
+                    <a:lstStyle/>
+                    <a:p>
+                      <a:r>
+                        <a:rPr sz="800">
+                          <a:solidFill>
+                            <a:srgbClr val="2B2B40"/>
+                          </a:solidFill>
+                          <a:latin typeface="Consolas"/>
+                        </a:rPr>
+                        <a:t>&lt;meta name="robots" content="index,follow"&gt;  (또는 태그 없음=허용)</a:t>
+                      </a:r>
+                    </a:p>
+                  </a:txBody>
+                  <a:tcPr marT="25400" marB="25400" anchor="ctr">
+                    <a:solidFill>
+                      <a:srgbClr val="F7F6F2"/>
+                    </a:solidFill>
+                  </a:tcPr>
+                </a:tc>
+              </a:tr>
+              <a:tr h="27432">
+                <a:tc>
+                  <a:txBody>
+                    <a:bodyPr/>
+                    <a:lstStyle/>
+                    <a:p>
+                      <a:pPr algn="ctr"/>
+                      <a:r>
+                        <a:rPr sz="1000" b="1">
+                          <a:solidFill>
+                            <a:srgbClr val="FFFFFF"/>
+                          </a:solidFill>
+                          <a:latin typeface="Arial"/>
+                        </a:rPr>
+                        <a:t>중</a:t>
+                      </a:r>
+                    </a:p>
+                  </a:txBody>
+                  <a:tcPr marT="25400" marB="25400" anchor="ctr">
+                    <a:solidFill>
+                      <a:srgbClr val="C47F12"/>
+                    </a:solidFill>
+                  </a:tcPr>
+                </a:tc>
+                <a:tc>
+                  <a:txBody>
+                    <a:bodyPr/>
+                    <a:lstStyle/>
+                    <a:p>
+                      <a:r>
+                        <a:rPr sz="950">
+                          <a:solidFill>
+                            <a:srgbClr val="1E1E2C"/>
+                          </a:solidFill>
+                          <a:latin typeface="Arial"/>
+                        </a:rPr>
+                        <a:t>사이트맵 제출·웹마스터도구/서치어드바이저 등록</a:t>
+                      </a:r>
+                    </a:p>
+                  </a:txBody>
+                  <a:tcPr marT="25400" marB="25400" anchor="ctr">
+                    <a:solidFill>
+                      <a:srgbClr val="FFFFFF"/>
+                    </a:solidFill>
+                  </a:tcPr>
+                </a:tc>
+                <a:tc>
+                  <a:txBody>
+                    <a:bodyPr/>
+                    <a:lstStyle/>
+                    <a:p>
+                      <a:r>
+                        <a:rPr sz="800">
+                          <a:solidFill>
+                            <a:srgbClr val="2B2B40"/>
+                          </a:solidFill>
+                          <a:latin typeface="Consolas"/>
+                        </a:rPr>
+                        <a:t># sitemap.xml(하위 URL·lastmod·changefreq·priority) 작성 후 네이버 웹마스터도구 요청&gt;사이트맵 제출 / 구글 Search Console 등록</a:t>
+                      </a:r>
+                    </a:p>
+                  </a:txBody>
+                  <a:tcPr marT="25400" marB="25400" anchor="ctr">
+                    <a:solidFill>
+                      <a:srgbClr val="F7F6F2"/>
+                    </a:solidFill>
+                  </a:tcPr>
+                </a:tc>
+              </a:tr>
+              <a:tr h="27432">
                 <a:tc>
                   <a:txBody>
                     <a:bodyPr/>
@@ -12720,7 +12927,7 @@
                           </a:solidFill>
                           <a:latin typeface="Arial"/>
                         </a:rPr>
-                        <a:t>분기(carrotBridge) 색인·canonical 정리</a:t>
+                        <a:t>분기(carrotBridge) 리다이렉트·canonical 정리</a:t>
                       </a:r>
                     </a:p>
                   </a:txBody>
@@ -12742,7 +12949,7 @@
                           </a:solidFill>
                           <a:latin typeface="Consolas"/>
                         </a:rPr>
-                        <a:t>&lt;!-- 목적지가 정본이면 301 + canonical 통일 --&gt;</a:t>
+                        <a:t>&lt;!-- 서버 HTTP 301(Location)로 이동 + 목적지 canonical 통일 --&gt;</a:t>
                       </a:r>
                     </a:p>
                     <a:p>
@@ -13553,7 +13760,7 @@
                           </a:solidFill>
                           <a:latin typeface="Arial"/>
                         </a:rPr>
-                        <a:t>분기(carrotBridge) 색인·canonical 정리</a:t>
+                        <a:t>분기(carrotBridge) 리다이렉트·canonical 정리</a:t>
                       </a:r>
                     </a:p>
                   </a:txBody>
@@ -13575,7 +13782,7 @@
                           </a:solidFill>
                           <a:latin typeface="Consolas"/>
                         </a:rPr>
-                        <a:t>&lt;!-- 목적지가 정본이면 301 + canonical 통일 --&gt;</a:t>
+                        <a:t>&lt;!-- 서버 HTTP 301(Location)로 이동 + 목적지 canonical 통일 --&gt;</a:t>
                       </a:r>
                     </a:p>
                     <a:p>

--- a/handoff/한화손보_장기CM_태깅가이드.pptx
+++ b/handoff/한화손보_장기CM_태깅가이드.pptx
@@ -7651,7 +7651,7 @@
                 <a:gridCol w="3108960"/>
                 <a:gridCol w="7086600"/>
               </a:tblGrid>
-              <a:tr h="27432">
+              <a:tr h="24938">
                 <a:tc>
                   <a:txBody>
                     <a:bodyPr/>
@@ -7719,7 +7719,7 @@
                   </a:tcPr>
                 </a:tc>
               </a:tr>
-              <a:tr h="27432">
+              <a:tr h="24938">
                 <a:tc>
                   <a:txBody>
                     <a:bodyPr/>
@@ -7788,7 +7788,7 @@
                   </a:tcPr>
                 </a:tc>
               </a:tr>
-              <a:tr h="27432">
+              <a:tr h="24938">
                 <a:tc>
                   <a:txBody>
                     <a:bodyPr/>
@@ -7857,7 +7857,7 @@
                   </a:tcPr>
                 </a:tc>
               </a:tr>
-              <a:tr h="27432">
+              <a:tr h="24938">
                 <a:tc>
                   <a:txBody>
                     <a:bodyPr/>
@@ -7926,7 +7926,7 @@
                   </a:tcPr>
                 </a:tc>
               </a:tr>
-              <a:tr h="27432">
+              <a:tr h="24938">
                 <a:tc>
                   <a:txBody>
                     <a:bodyPr/>
@@ -8160,7 +8160,7 @@
                   </a:tcPr>
                 </a:tc>
               </a:tr>
-              <a:tr h="27432">
+              <a:tr h="24938">
                 <a:tc>
                   <a:txBody>
                     <a:bodyPr/>
@@ -8262,7 +8262,7 @@
                   </a:tcPr>
                 </a:tc>
               </a:tr>
-              <a:tr h="27432">
+              <a:tr h="24938">
                 <a:tc>
                   <a:txBody>
                     <a:bodyPr/>
@@ -8342,7 +8342,7 @@
                   </a:tcPr>
                 </a:tc>
               </a:tr>
-              <a:tr h="27432">
+              <a:tr h="24938">
                 <a:tc>
                   <a:txBody>
                     <a:bodyPr/>
@@ -8411,7 +8411,7 @@
                   </a:tcPr>
                 </a:tc>
               </a:tr>
-              <a:tr h="27432">
+              <a:tr h="24938">
                 <a:tc>
                   <a:txBody>
                     <a:bodyPr/>
@@ -8480,7 +8480,76 @@
                   </a:tcPr>
                 </a:tc>
               </a:tr>
-              <a:tr h="27432">
+              <a:tr h="24938">
+                <a:tc>
+                  <a:txBody>
+                    <a:bodyPr/>
+                    <a:lstStyle/>
+                    <a:p>
+                      <a:pPr algn="ctr"/>
+                      <a:r>
+                        <a:rPr sz="1000" b="1">
+                          <a:solidFill>
+                            <a:srgbClr val="FFFFFF"/>
+                          </a:solidFill>
+                          <a:latin typeface="Arial"/>
+                        </a:rPr>
+                        <a:t>하</a:t>
+                      </a:r>
+                    </a:p>
+                  </a:txBody>
+                  <a:tcPr marT="25400" marB="25400" anchor="ctr">
+                    <a:solidFill>
+                      <a:srgbClr val="8A8EA0"/>
+                    </a:solidFill>
+                  </a:tcPr>
+                </a:tc>
+                <a:tc>
+                  <a:txBody>
+                    <a:bodyPr/>
+                    <a:lstStyle/>
+                    <a:p>
+                      <a:r>
+                        <a:rPr sz="950">
+                          <a:solidFill>
+                            <a:srgbClr val="1E1E2C"/>
+                          </a:solidFill>
+                          <a:latin typeface="Arial"/>
+                        </a:rPr>
+                        <a:t>연관 채널 구조화 데이터 (선택·고급)</a:t>
+                      </a:r>
+                    </a:p>
+                  </a:txBody>
+                  <a:tcPr marT="25400" marB="25400" anchor="ctr">
+                    <a:solidFill>
+                      <a:srgbClr val="FFFFFF"/>
+                    </a:solidFill>
+                  </a:tcPr>
+                </a:tc>
+                <a:tc>
+                  <a:txBody>
+                    <a:bodyPr/>
+                    <a:lstStyle/>
+                    <a:p>
+                      <a:r>
+                        <a:rPr sz="800">
+                          <a:solidFill>
+                            <a:srgbClr val="2B2B40"/>
+                          </a:solidFill>
+                          <a:latin typeface="Consolas"/>
+                        </a:rPr>
+                        <a:t>&lt;script type="application/ld+json"&gt;{"@context":"https://schema.org","@type":"Organization","name":"한화손해보험 다이렉트","url":"https://www.hanwhadirect.com/","sameAs":["https://blog.naver.com/hwgi01","인스타/유튜브 공식채널"]}&lt;/script&gt;</a:t>
+                      </a:r>
+                    </a:p>
+                  </a:txBody>
+                  <a:tcPr marT="25400" marB="25400" anchor="ctr">
+                    <a:solidFill>
+                      <a:srgbClr val="F7F6F2"/>
+                    </a:solidFill>
+                  </a:tcPr>
+                </a:tc>
+              </a:tr>
+              <a:tr h="24940">
                 <a:tc>
                   <a:txBody>
                     <a:bodyPr/>
